--- a/00-Basic-Pandas.pptx
+++ b/00-Basic-Pandas.pptx
@@ -18,18 +18,28 @@
     <p:sldId id="267" r:id="rId12"/>
     <p:sldId id="268" r:id="rId13"/>
     <p:sldId id="269" r:id="rId14"/>
+    <p:sldId id="270" r:id="rId15"/>
+    <p:sldId id="271" r:id="rId16"/>
+    <p:sldId id="273" r:id="rId17"/>
+    <p:sldId id="275" r:id="rId18"/>
+    <p:sldId id="276" r:id="rId19"/>
+    <p:sldId id="277" r:id="rId20"/>
+    <p:sldId id="278" r:id="rId21"/>
+    <p:sldId id="279" r:id="rId22"/>
+    <p:sldId id="280" r:id="rId23"/>
+    <p:sldId id="281" r:id="rId24"/>
   </p:sldIdLst>
   <p:sldSz cx="12192000" cy="6858000"/>
   <p:notesSz cx="6858000" cy="9144000"/>
   <p:embeddedFontLst>
     <p:embeddedFont>
       <p:font typeface="Anuphan" pitchFamily="2" charset="-34"/>
-      <p:regular r:id="rId15"/>
-      <p:bold r:id="rId16"/>
+      <p:regular r:id="rId25"/>
+      <p:bold r:id="rId26"/>
     </p:embeddedFont>
     <p:embeddedFont>
       <p:font typeface="Bahnschrift Light" panose="020B0502040204020203" pitchFamily="34" charset="0"/>
-      <p:regular r:id="rId17"/>
+      <p:regular r:id="rId27"/>
     </p:embeddedFont>
   </p:embeddedFontLst>
   <p:defaultTextStyle>
@@ -127,6 +137,11 @@
       </a:defRPr>
     </a:lvl9pPr>
   </p:defaultTextStyle>
+  <p:extLst>
+    <p:ext uri="{EFAFB233-063F-42B5-8137-9DF3F51BA10A}">
+      <p15:sldGuideLst xmlns:p15="http://schemas.microsoft.com/office/powerpoint/2012/main"/>
+    </p:ext>
+  </p:extLst>
 </p:presentation>
 </file>
 
@@ -277,7 +292,7 @@
           <a:p>
             <a:fld id="{31E8CDDB-820E-43FE-983B-5D4895E9E6FF}" type="datetimeFigureOut">
               <a:rPr lang="en-US" smtClean="0"/>
-              <a:t>4/15/2026</a:t>
+              <a:t>4/16/2026</a:t>
             </a:fld>
             <a:endParaRPr lang="en-US"/>
           </a:p>
@@ -475,7 +490,7 @@
           <a:p>
             <a:fld id="{31E8CDDB-820E-43FE-983B-5D4895E9E6FF}" type="datetimeFigureOut">
               <a:rPr lang="en-US" smtClean="0"/>
-              <a:t>4/15/2026</a:t>
+              <a:t>4/16/2026</a:t>
             </a:fld>
             <a:endParaRPr lang="en-US"/>
           </a:p>
@@ -683,7 +698,7 @@
           <a:p>
             <a:fld id="{31E8CDDB-820E-43FE-983B-5D4895E9E6FF}" type="datetimeFigureOut">
               <a:rPr lang="en-US" smtClean="0"/>
-              <a:t>4/15/2026</a:t>
+              <a:t>4/16/2026</a:t>
             </a:fld>
             <a:endParaRPr lang="en-US"/>
           </a:p>
@@ -881,7 +896,7 @@
           <a:p>
             <a:fld id="{31E8CDDB-820E-43FE-983B-5D4895E9E6FF}" type="datetimeFigureOut">
               <a:rPr lang="en-US" smtClean="0"/>
-              <a:t>4/15/2026</a:t>
+              <a:t>4/16/2026</a:t>
             </a:fld>
             <a:endParaRPr lang="en-US"/>
           </a:p>
@@ -1156,7 +1171,7 @@
           <a:p>
             <a:fld id="{31E8CDDB-820E-43FE-983B-5D4895E9E6FF}" type="datetimeFigureOut">
               <a:rPr lang="en-US" smtClean="0"/>
-              <a:t>4/15/2026</a:t>
+              <a:t>4/16/2026</a:t>
             </a:fld>
             <a:endParaRPr lang="en-US"/>
           </a:p>
@@ -1421,7 +1436,7 @@
           <a:p>
             <a:fld id="{31E8CDDB-820E-43FE-983B-5D4895E9E6FF}" type="datetimeFigureOut">
               <a:rPr lang="en-US" smtClean="0"/>
-              <a:t>4/15/2026</a:t>
+              <a:t>4/16/2026</a:t>
             </a:fld>
             <a:endParaRPr lang="en-US"/>
           </a:p>
@@ -1833,7 +1848,7 @@
           <a:p>
             <a:fld id="{31E8CDDB-820E-43FE-983B-5D4895E9E6FF}" type="datetimeFigureOut">
               <a:rPr lang="en-US" smtClean="0"/>
-              <a:t>4/15/2026</a:t>
+              <a:t>4/16/2026</a:t>
             </a:fld>
             <a:endParaRPr lang="en-US"/>
           </a:p>
@@ -1974,7 +1989,7 @@
           <a:p>
             <a:fld id="{31E8CDDB-820E-43FE-983B-5D4895E9E6FF}" type="datetimeFigureOut">
               <a:rPr lang="en-US" smtClean="0"/>
-              <a:t>4/15/2026</a:t>
+              <a:t>4/16/2026</a:t>
             </a:fld>
             <a:endParaRPr lang="en-US"/>
           </a:p>
@@ -2087,7 +2102,7 @@
           <a:p>
             <a:fld id="{31E8CDDB-820E-43FE-983B-5D4895E9E6FF}" type="datetimeFigureOut">
               <a:rPr lang="en-US" smtClean="0"/>
-              <a:t>4/15/2026</a:t>
+              <a:t>4/16/2026</a:t>
             </a:fld>
             <a:endParaRPr lang="en-US"/>
           </a:p>
@@ -2398,7 +2413,7 @@
           <a:p>
             <a:fld id="{31E8CDDB-820E-43FE-983B-5D4895E9E6FF}" type="datetimeFigureOut">
               <a:rPr lang="en-US" smtClean="0"/>
-              <a:t>4/15/2026</a:t>
+              <a:t>4/16/2026</a:t>
             </a:fld>
             <a:endParaRPr lang="en-US"/>
           </a:p>
@@ -2686,7 +2701,7 @@
           <a:p>
             <a:fld id="{31E8CDDB-820E-43FE-983B-5D4895E9E6FF}" type="datetimeFigureOut">
               <a:rPr lang="en-US" smtClean="0"/>
-              <a:t>4/15/2026</a:t>
+              <a:t>4/16/2026</a:t>
             </a:fld>
             <a:endParaRPr lang="en-US"/>
           </a:p>
@@ -2927,7 +2942,7 @@
           <a:p>
             <a:fld id="{31E8CDDB-820E-43FE-983B-5D4895E9E6FF}" type="datetimeFigureOut">
               <a:rPr lang="en-US" smtClean="0"/>
-              <a:t>4/15/2026</a:t>
+              <a:t>4/16/2026</a:t>
             </a:fld>
             <a:endParaRPr lang="en-US"/>
           </a:p>
@@ -4089,6 +4104,871 @@
 </p:sld>
 </file>
 
+<file path=ppt/slides/slide14.xml><?xml version="1.0" encoding="utf-8"?>
+<p:sld xmlns:a="http://schemas.openxmlformats.org/drawingml/2006/main" xmlns:r="http://schemas.openxmlformats.org/officeDocument/2006/relationships" xmlns:p="http://schemas.openxmlformats.org/presentationml/2006/main">
+  <p:cSld>
+    <p:spTree>
+      <p:nvGrpSpPr>
+        <p:cNvPr id="1" name="">
+          <a:extLst>
+            <a:ext uri="{FF2B5EF4-FFF2-40B4-BE49-F238E27FC236}">
+              <a16:creationId xmlns:a16="http://schemas.microsoft.com/office/drawing/2014/main" id="{67B4D56B-5614-3A56-8883-908285FBF6AF}"/>
+            </a:ext>
+          </a:extLst>
+        </p:cNvPr>
+        <p:cNvGrpSpPr/>
+        <p:nvPr/>
+      </p:nvGrpSpPr>
+      <p:grpSpPr>
+        <a:xfrm>
+          <a:off x="0" y="0"/>
+          <a:ext cx="0" cy="0"/>
+          <a:chOff x="0" y="0"/>
+          <a:chExt cx="0" cy="0"/>
+        </a:xfrm>
+      </p:grpSpPr>
+      <p:sp>
+        <p:nvSpPr>
+          <p:cNvPr id="4" name="TextBox 3">
+            <a:extLst>
+              <a:ext uri="{FF2B5EF4-FFF2-40B4-BE49-F238E27FC236}">
+                <a16:creationId xmlns:a16="http://schemas.microsoft.com/office/drawing/2014/main" id="{AC469AF8-C314-D311-620D-2DB8DEB3D66E}"/>
+              </a:ext>
+            </a:extLst>
+          </p:cNvPr>
+          <p:cNvSpPr txBox="1"/>
+          <p:nvPr/>
+        </p:nvSpPr>
+        <p:spPr>
+          <a:xfrm>
+            <a:off x="796412" y="1118022"/>
+            <a:ext cx="10540181" cy="769441"/>
+          </a:xfrm>
+          <a:prstGeom prst="rect">
+            <a:avLst/>
+          </a:prstGeom>
+          <a:noFill/>
+        </p:spPr>
+        <p:txBody>
+          <a:bodyPr wrap="square" rtlCol="0">
+            <a:spAutoFit/>
+          </a:bodyPr>
+          <a:lstStyle/>
+          <a:p>
+            <a:r>
+              <a:rPr lang="en-US" sz="4400" dirty="0">
+                <a:solidFill>
+                  <a:schemeClr val="tx1">
+                    <a:lumMod val="75000"/>
+                    <a:lumOff val="25000"/>
+                  </a:schemeClr>
+                </a:solidFill>
+                <a:latin typeface="Anuphan" pitchFamily="2" charset="-34"/>
+                <a:cs typeface="Anuphan" pitchFamily="2" charset="-34"/>
+              </a:rPr>
+              <a:t>DataFrame – Group By</a:t>
+            </a:r>
+          </a:p>
+        </p:txBody>
+      </p:sp>
+      <p:pic>
+        <p:nvPicPr>
+          <p:cNvPr id="3" name="Picture 2">
+            <a:extLst>
+              <a:ext uri="{FF2B5EF4-FFF2-40B4-BE49-F238E27FC236}">
+                <a16:creationId xmlns:a16="http://schemas.microsoft.com/office/drawing/2014/main" id="{6AA11626-E7A0-8E2C-53A6-98CA2FEC70A7}"/>
+              </a:ext>
+            </a:extLst>
+          </p:cNvPr>
+          <p:cNvPicPr>
+            <a:picLocks noChangeAspect="1"/>
+          </p:cNvPicPr>
+          <p:nvPr/>
+        </p:nvPicPr>
+        <p:blipFill>
+          <a:blip r:embed="rId2"/>
+          <a:stretch>
+            <a:fillRect/>
+          </a:stretch>
+        </p:blipFill>
+        <p:spPr>
+          <a:xfrm>
+            <a:off x="796412" y="2035411"/>
+            <a:ext cx="8986814" cy="1174954"/>
+          </a:xfrm>
+          <a:prstGeom prst="rect">
+            <a:avLst/>
+          </a:prstGeom>
+          <a:ln w="38100" cap="sq">
+            <a:solidFill>
+              <a:srgbClr val="000000"/>
+            </a:solidFill>
+            <a:prstDash val="solid"/>
+            <a:miter lim="800000"/>
+          </a:ln>
+          <a:effectLst>
+            <a:outerShdw blurRad="50800" dist="38100" dir="2700000" algn="tl" rotWithShape="0">
+              <a:srgbClr val="000000">
+                <a:alpha val="43000"/>
+              </a:srgbClr>
+            </a:outerShdw>
+          </a:effectLst>
+        </p:spPr>
+      </p:pic>
+      <p:pic>
+        <p:nvPicPr>
+          <p:cNvPr id="6" name="Picture 5">
+            <a:extLst>
+              <a:ext uri="{FF2B5EF4-FFF2-40B4-BE49-F238E27FC236}">
+                <a16:creationId xmlns:a16="http://schemas.microsoft.com/office/drawing/2014/main" id="{DB530E66-BAC3-27CE-F7F6-20FF5B7445A0}"/>
+              </a:ext>
+            </a:extLst>
+          </p:cNvPr>
+          <p:cNvPicPr>
+            <a:picLocks noChangeAspect="1"/>
+          </p:cNvPicPr>
+          <p:nvPr/>
+        </p:nvPicPr>
+        <p:blipFill>
+          <a:blip r:embed="rId3"/>
+          <a:stretch>
+            <a:fillRect/>
+          </a:stretch>
+        </p:blipFill>
+        <p:spPr>
+          <a:xfrm>
+            <a:off x="796412" y="3358314"/>
+            <a:ext cx="5073446" cy="2892227"/>
+          </a:xfrm>
+          <a:prstGeom prst="rect">
+            <a:avLst/>
+          </a:prstGeom>
+          <a:ln w="38100" cap="sq">
+            <a:solidFill>
+              <a:srgbClr val="000000"/>
+            </a:solidFill>
+            <a:prstDash val="solid"/>
+            <a:miter lim="800000"/>
+          </a:ln>
+          <a:effectLst>
+            <a:outerShdw blurRad="50800" dist="38100" dir="2700000" algn="tl" rotWithShape="0">
+              <a:srgbClr val="000000">
+                <a:alpha val="43000"/>
+              </a:srgbClr>
+            </a:outerShdw>
+          </a:effectLst>
+        </p:spPr>
+      </p:pic>
+    </p:spTree>
+    <p:extLst>
+      <p:ext uri="{BB962C8B-B14F-4D97-AF65-F5344CB8AC3E}">
+        <p14:creationId xmlns:p14="http://schemas.microsoft.com/office/powerpoint/2010/main" val="2547578588"/>
+      </p:ext>
+    </p:extLst>
+  </p:cSld>
+  <p:clrMapOvr>
+    <a:masterClrMapping/>
+  </p:clrMapOvr>
+</p:sld>
+</file>
+
+<file path=ppt/slides/slide15.xml><?xml version="1.0" encoding="utf-8"?>
+<p:sld xmlns:a="http://schemas.openxmlformats.org/drawingml/2006/main" xmlns:r="http://schemas.openxmlformats.org/officeDocument/2006/relationships" xmlns:p="http://schemas.openxmlformats.org/presentationml/2006/main">
+  <p:cSld>
+    <p:spTree>
+      <p:nvGrpSpPr>
+        <p:cNvPr id="1" name="">
+          <a:extLst>
+            <a:ext uri="{FF2B5EF4-FFF2-40B4-BE49-F238E27FC236}">
+              <a16:creationId xmlns:a16="http://schemas.microsoft.com/office/drawing/2014/main" id="{E4F76385-8198-6AAA-7FA1-CE9074C0E60B}"/>
+            </a:ext>
+          </a:extLst>
+        </p:cNvPr>
+        <p:cNvGrpSpPr/>
+        <p:nvPr/>
+      </p:nvGrpSpPr>
+      <p:grpSpPr>
+        <a:xfrm>
+          <a:off x="0" y="0"/>
+          <a:ext cx="0" cy="0"/>
+          <a:chOff x="0" y="0"/>
+          <a:chExt cx="0" cy="0"/>
+        </a:xfrm>
+      </p:grpSpPr>
+      <p:sp>
+        <p:nvSpPr>
+          <p:cNvPr id="4" name="TextBox 3">
+            <a:extLst>
+              <a:ext uri="{FF2B5EF4-FFF2-40B4-BE49-F238E27FC236}">
+                <a16:creationId xmlns:a16="http://schemas.microsoft.com/office/drawing/2014/main" id="{93CCB696-BD1E-18DC-72C2-EEAA9F919778}"/>
+              </a:ext>
+            </a:extLst>
+          </p:cNvPr>
+          <p:cNvSpPr txBox="1"/>
+          <p:nvPr/>
+        </p:nvSpPr>
+        <p:spPr>
+          <a:xfrm>
+            <a:off x="796412" y="3044279"/>
+            <a:ext cx="10540181" cy="769441"/>
+          </a:xfrm>
+          <a:prstGeom prst="rect">
+            <a:avLst/>
+          </a:prstGeom>
+          <a:noFill/>
+        </p:spPr>
+        <p:txBody>
+          <a:bodyPr wrap="square" rtlCol="0">
+            <a:spAutoFit/>
+          </a:bodyPr>
+          <a:lstStyle/>
+          <a:p>
+            <a:r>
+              <a:rPr lang="en-US" sz="4400" b="1" dirty="0">
+                <a:solidFill>
+                  <a:schemeClr val="tx1">
+                    <a:lumMod val="75000"/>
+                    <a:lumOff val="25000"/>
+                  </a:schemeClr>
+                </a:solidFill>
+                <a:latin typeface="Anuphan" pitchFamily="2" charset="-34"/>
+                <a:cs typeface="Anuphan" pitchFamily="2" charset="-34"/>
+              </a:rPr>
+              <a:t>Basic Aggregation </a:t>
+            </a:r>
+          </a:p>
+        </p:txBody>
+      </p:sp>
+      <p:sp>
+        <p:nvSpPr>
+          <p:cNvPr id="2" name="TextBox 1">
+            <a:extLst>
+              <a:ext uri="{FF2B5EF4-FFF2-40B4-BE49-F238E27FC236}">
+                <a16:creationId xmlns:a16="http://schemas.microsoft.com/office/drawing/2014/main" id="{7DD055EF-CBE5-8ABA-7D7B-B6FD0AF26BD1}"/>
+              </a:ext>
+            </a:extLst>
+          </p:cNvPr>
+          <p:cNvSpPr txBox="1"/>
+          <p:nvPr/>
+        </p:nvSpPr>
+        <p:spPr>
+          <a:xfrm>
+            <a:off x="796411" y="3813720"/>
+            <a:ext cx="10540181" cy="461665"/>
+          </a:xfrm>
+          <a:prstGeom prst="rect">
+            <a:avLst/>
+          </a:prstGeom>
+          <a:noFill/>
+        </p:spPr>
+        <p:txBody>
+          <a:bodyPr wrap="square" rtlCol="0">
+            <a:spAutoFit/>
+          </a:bodyPr>
+          <a:lstStyle/>
+          <a:p>
+            <a:r>
+              <a:rPr lang="en-US" sz="2400" dirty="0">
+                <a:solidFill>
+                  <a:schemeClr val="tx1">
+                    <a:lumMod val="75000"/>
+                    <a:lumOff val="25000"/>
+                  </a:schemeClr>
+                </a:solidFill>
+                <a:latin typeface="Anuphan" pitchFamily="2" charset="-34"/>
+                <a:cs typeface="Anuphan" pitchFamily="2" charset="-34"/>
+              </a:rPr>
+              <a:t>01 basic pandas practice</a:t>
+            </a:r>
+          </a:p>
+        </p:txBody>
+      </p:sp>
+    </p:spTree>
+    <p:extLst>
+      <p:ext uri="{BB962C8B-B14F-4D97-AF65-F5344CB8AC3E}">
+        <p14:creationId xmlns:p14="http://schemas.microsoft.com/office/powerpoint/2010/main" val="1751798249"/>
+      </p:ext>
+    </p:extLst>
+  </p:cSld>
+  <p:clrMapOvr>
+    <a:masterClrMapping/>
+  </p:clrMapOvr>
+</p:sld>
+</file>
+
+<file path=ppt/slides/slide16.xml><?xml version="1.0" encoding="utf-8"?>
+<p:sld xmlns:a="http://schemas.openxmlformats.org/drawingml/2006/main" xmlns:r="http://schemas.openxmlformats.org/officeDocument/2006/relationships" xmlns:p="http://schemas.openxmlformats.org/presentationml/2006/main">
+  <p:cSld>
+    <p:spTree>
+      <p:nvGrpSpPr>
+        <p:cNvPr id="1" name="">
+          <a:extLst>
+            <a:ext uri="{FF2B5EF4-FFF2-40B4-BE49-F238E27FC236}">
+              <a16:creationId xmlns:a16="http://schemas.microsoft.com/office/drawing/2014/main" id="{62AE4CBA-0297-0B80-3EA2-AD675DF75AA0}"/>
+            </a:ext>
+          </a:extLst>
+        </p:cNvPr>
+        <p:cNvGrpSpPr/>
+        <p:nvPr/>
+      </p:nvGrpSpPr>
+      <p:grpSpPr>
+        <a:xfrm>
+          <a:off x="0" y="0"/>
+          <a:ext cx="0" cy="0"/>
+          <a:chOff x="0" y="0"/>
+          <a:chExt cx="0" cy="0"/>
+        </a:xfrm>
+      </p:grpSpPr>
+      <p:sp>
+        <p:nvSpPr>
+          <p:cNvPr id="4" name="TextBox 3">
+            <a:extLst>
+              <a:ext uri="{FF2B5EF4-FFF2-40B4-BE49-F238E27FC236}">
+                <a16:creationId xmlns:a16="http://schemas.microsoft.com/office/drawing/2014/main" id="{78F2DB9F-A5DE-0821-BACF-439BFF0BAA66}"/>
+              </a:ext>
+            </a:extLst>
+          </p:cNvPr>
+          <p:cNvSpPr txBox="1"/>
+          <p:nvPr/>
+        </p:nvSpPr>
+        <p:spPr>
+          <a:xfrm>
+            <a:off x="796412" y="1118022"/>
+            <a:ext cx="10540181" cy="830997"/>
+          </a:xfrm>
+          <a:prstGeom prst="rect">
+            <a:avLst/>
+          </a:prstGeom>
+          <a:noFill/>
+        </p:spPr>
+        <p:txBody>
+          <a:bodyPr wrap="square" rtlCol="0">
+            <a:spAutoFit/>
+          </a:bodyPr>
+          <a:lstStyle/>
+          <a:p>
+            <a:r>
+              <a:rPr lang="en-US" sz="4800" dirty="0">
+                <a:solidFill>
+                  <a:schemeClr val="tx1">
+                    <a:lumMod val="75000"/>
+                    <a:lumOff val="25000"/>
+                  </a:schemeClr>
+                </a:solidFill>
+                <a:latin typeface="Anuphan" pitchFamily="2" charset="-34"/>
+                <a:cs typeface="Anuphan" pitchFamily="2" charset="-34"/>
+              </a:rPr>
+              <a:t>Example Data</a:t>
+            </a:r>
+          </a:p>
+        </p:txBody>
+      </p:sp>
+      <p:sp>
+        <p:nvSpPr>
+          <p:cNvPr id="2" name="TextBox 1">
+            <a:extLst>
+              <a:ext uri="{FF2B5EF4-FFF2-40B4-BE49-F238E27FC236}">
+                <a16:creationId xmlns:a16="http://schemas.microsoft.com/office/drawing/2014/main" id="{70B2CBC1-5690-ADFF-1301-CF212F95E505}"/>
+              </a:ext>
+            </a:extLst>
+          </p:cNvPr>
+          <p:cNvSpPr txBox="1"/>
+          <p:nvPr/>
+        </p:nvSpPr>
+        <p:spPr>
+          <a:xfrm>
+            <a:off x="796411" y="2071751"/>
+            <a:ext cx="10540181" cy="1938992"/>
+          </a:xfrm>
+          <a:prstGeom prst="rect">
+            <a:avLst/>
+          </a:prstGeom>
+          <a:noFill/>
+        </p:spPr>
+        <p:txBody>
+          <a:bodyPr wrap="square" rtlCol="0">
+            <a:spAutoFit/>
+          </a:bodyPr>
+          <a:lstStyle/>
+          <a:p>
+            <a:r>
+              <a:rPr lang="en-US" sz="1200" dirty="0">
+                <a:latin typeface="Bahnschrift Light" panose="020B0502040204020203" pitchFamily="34" charset="0"/>
+              </a:rPr>
+              <a:t>import pandas as pd</a:t>
+            </a:r>
+          </a:p>
+          <a:p>
+            <a:endParaRPr lang="en-US" sz="1200" dirty="0">
+              <a:latin typeface="Bahnschrift Light" panose="020B0502040204020203" pitchFamily="34" charset="0"/>
+            </a:endParaRPr>
+          </a:p>
+          <a:p>
+            <a:r>
+              <a:rPr lang="en-US" sz="1200" dirty="0">
+                <a:latin typeface="Bahnschrift Light" panose="020B0502040204020203" pitchFamily="34" charset="0"/>
+              </a:rPr>
+              <a:t>data = {</a:t>
+            </a:r>
+          </a:p>
+          <a:p>
+            <a:r>
+              <a:rPr lang="en-US" sz="1200" dirty="0">
+                <a:latin typeface="Bahnschrift Light" panose="020B0502040204020203" pitchFamily="34" charset="0"/>
+              </a:rPr>
+              <a:t>    "name":       ["Alice", "Bob", "Charlie", "Diana", "Eve", "Frank"],</a:t>
+            </a:r>
+          </a:p>
+          <a:p>
+            <a:r>
+              <a:rPr lang="en-US" sz="1200" dirty="0">
+                <a:latin typeface="Bahnschrift Light" panose="020B0502040204020203" pitchFamily="34" charset="0"/>
+              </a:rPr>
+              <a:t>    "department": ["HR", "IT", "IT", "Finance", "HR", "Finance"],</a:t>
+            </a:r>
+          </a:p>
+          <a:p>
+            <a:r>
+              <a:rPr lang="en-US" sz="1200" dirty="0">
+                <a:latin typeface="Bahnschrift Light" panose="020B0502040204020203" pitchFamily="34" charset="0"/>
+              </a:rPr>
+              <a:t>    "salary":     [55000, 72000, 68000, 80000, 52000, 91000],</a:t>
+            </a:r>
+          </a:p>
+          <a:p>
+            <a:r>
+              <a:rPr lang="en-US" sz="1200" dirty="0">
+                <a:latin typeface="Bahnschrift Light" panose="020B0502040204020203" pitchFamily="34" charset="0"/>
+              </a:rPr>
+              <a:t>    "age":        [29, 34, 28, 41, 35, 47]</a:t>
+            </a:r>
+          </a:p>
+          <a:p>
+            <a:r>
+              <a:rPr lang="en-US" sz="1200" dirty="0">
+                <a:latin typeface="Bahnschrift Light" panose="020B0502040204020203" pitchFamily="34" charset="0"/>
+              </a:rPr>
+              <a:t>}</a:t>
+            </a:r>
+          </a:p>
+          <a:p>
+            <a:endParaRPr lang="en-US" sz="1200" dirty="0">
+              <a:latin typeface="Bahnschrift Light" panose="020B0502040204020203" pitchFamily="34" charset="0"/>
+            </a:endParaRPr>
+          </a:p>
+          <a:p>
+            <a:r>
+              <a:rPr lang="en-US" sz="1200" dirty="0" err="1">
+                <a:latin typeface="Bahnschrift Light" panose="020B0502040204020203" pitchFamily="34" charset="0"/>
+              </a:rPr>
+              <a:t>df</a:t>
+            </a:r>
+            <a:r>
+              <a:rPr lang="en-US" sz="1200" dirty="0">
+                <a:latin typeface="Bahnschrift Light" panose="020B0502040204020203" pitchFamily="34" charset="0"/>
+              </a:rPr>
+              <a:t> = </a:t>
+            </a:r>
+            <a:r>
+              <a:rPr lang="en-US" sz="1200" dirty="0" err="1">
+                <a:latin typeface="Bahnschrift Light" panose="020B0502040204020203" pitchFamily="34" charset="0"/>
+              </a:rPr>
+              <a:t>pd.DataFrame</a:t>
+            </a:r>
+            <a:r>
+              <a:rPr lang="en-US" sz="1200" dirty="0">
+                <a:latin typeface="Bahnschrift Light" panose="020B0502040204020203" pitchFamily="34" charset="0"/>
+              </a:rPr>
+              <a:t>(data)</a:t>
+            </a:r>
+          </a:p>
+        </p:txBody>
+      </p:sp>
+    </p:spTree>
+    <p:extLst>
+      <p:ext uri="{BB962C8B-B14F-4D97-AF65-F5344CB8AC3E}">
+        <p14:creationId xmlns:p14="http://schemas.microsoft.com/office/powerpoint/2010/main" val="3760428669"/>
+      </p:ext>
+    </p:extLst>
+  </p:cSld>
+  <p:clrMapOvr>
+    <a:masterClrMapping/>
+  </p:clrMapOvr>
+</p:sld>
+</file>
+
+<file path=ppt/slides/slide17.xml><?xml version="1.0" encoding="utf-8"?>
+<p:sld xmlns:a="http://schemas.openxmlformats.org/drawingml/2006/main" xmlns:r="http://schemas.openxmlformats.org/officeDocument/2006/relationships" xmlns:p="http://schemas.openxmlformats.org/presentationml/2006/main">
+  <p:cSld>
+    <p:spTree>
+      <p:nvGrpSpPr>
+        <p:cNvPr id="1" name="">
+          <a:extLst>
+            <a:ext uri="{FF2B5EF4-FFF2-40B4-BE49-F238E27FC236}">
+              <a16:creationId xmlns:a16="http://schemas.microsoft.com/office/drawing/2014/main" id="{A4CCD703-E8BA-B637-B807-FC91A277D4F3}"/>
+            </a:ext>
+          </a:extLst>
+        </p:cNvPr>
+        <p:cNvGrpSpPr/>
+        <p:nvPr/>
+      </p:nvGrpSpPr>
+      <p:grpSpPr>
+        <a:xfrm>
+          <a:off x="0" y="0"/>
+          <a:ext cx="0" cy="0"/>
+          <a:chOff x="0" y="0"/>
+          <a:chExt cx="0" cy="0"/>
+        </a:xfrm>
+      </p:grpSpPr>
+      <p:sp>
+        <p:nvSpPr>
+          <p:cNvPr id="4" name="TextBox 3">
+            <a:extLst>
+              <a:ext uri="{FF2B5EF4-FFF2-40B4-BE49-F238E27FC236}">
+                <a16:creationId xmlns:a16="http://schemas.microsoft.com/office/drawing/2014/main" id="{3CB4BC8B-5887-8B4D-684E-01791ACE410F}"/>
+              </a:ext>
+            </a:extLst>
+          </p:cNvPr>
+          <p:cNvSpPr txBox="1"/>
+          <p:nvPr/>
+        </p:nvSpPr>
+        <p:spPr>
+          <a:xfrm>
+            <a:off x="796412" y="1118022"/>
+            <a:ext cx="10540181" cy="769441"/>
+          </a:xfrm>
+          <a:prstGeom prst="rect">
+            <a:avLst/>
+          </a:prstGeom>
+          <a:noFill/>
+        </p:spPr>
+        <p:txBody>
+          <a:bodyPr wrap="square" rtlCol="0">
+            <a:spAutoFit/>
+          </a:bodyPr>
+          <a:lstStyle/>
+          <a:p>
+            <a:r>
+              <a:rPr lang="en-US" sz="4400" dirty="0">
+                <a:solidFill>
+                  <a:schemeClr val="tx1">
+                    <a:lumMod val="75000"/>
+                    <a:lumOff val="25000"/>
+                  </a:schemeClr>
+                </a:solidFill>
+                <a:latin typeface="Anuphan" pitchFamily="2" charset="-34"/>
+                <a:cs typeface="Anuphan" pitchFamily="2" charset="-34"/>
+              </a:rPr>
+              <a:t>Basic Aggregation (whole column)</a:t>
+            </a:r>
+          </a:p>
+        </p:txBody>
+      </p:sp>
+      <p:pic>
+        <p:nvPicPr>
+          <p:cNvPr id="5" name="Picture 4">
+            <a:extLst>
+              <a:ext uri="{FF2B5EF4-FFF2-40B4-BE49-F238E27FC236}">
+                <a16:creationId xmlns:a16="http://schemas.microsoft.com/office/drawing/2014/main" id="{599336A5-8BBE-DC6E-543A-A36FB73AF299}"/>
+              </a:ext>
+            </a:extLst>
+          </p:cNvPr>
+          <p:cNvPicPr>
+            <a:picLocks noChangeAspect="1"/>
+          </p:cNvPicPr>
+          <p:nvPr/>
+        </p:nvPicPr>
+        <p:blipFill>
+          <a:blip r:embed="rId2"/>
+          <a:stretch>
+            <a:fillRect/>
+          </a:stretch>
+        </p:blipFill>
+        <p:spPr>
+          <a:xfrm>
+            <a:off x="986764" y="2446774"/>
+            <a:ext cx="10218472" cy="2908998"/>
+          </a:xfrm>
+          <a:prstGeom prst="rect">
+            <a:avLst/>
+          </a:prstGeom>
+          <a:ln w="38100" cap="sq">
+            <a:solidFill>
+              <a:srgbClr val="000000"/>
+            </a:solidFill>
+            <a:prstDash val="solid"/>
+            <a:miter lim="800000"/>
+          </a:ln>
+          <a:effectLst>
+            <a:outerShdw blurRad="50800" dist="38100" dir="2700000" algn="tl" rotWithShape="0">
+              <a:srgbClr val="000000">
+                <a:alpha val="43000"/>
+              </a:srgbClr>
+            </a:outerShdw>
+          </a:effectLst>
+        </p:spPr>
+      </p:pic>
+    </p:spTree>
+    <p:extLst>
+      <p:ext uri="{BB962C8B-B14F-4D97-AF65-F5344CB8AC3E}">
+        <p14:creationId xmlns:p14="http://schemas.microsoft.com/office/powerpoint/2010/main" val="768482865"/>
+      </p:ext>
+    </p:extLst>
+  </p:cSld>
+  <p:clrMapOvr>
+    <a:masterClrMapping/>
+  </p:clrMapOvr>
+</p:sld>
+</file>
+
+<file path=ppt/slides/slide18.xml><?xml version="1.0" encoding="utf-8"?>
+<p:sld xmlns:a="http://schemas.openxmlformats.org/drawingml/2006/main" xmlns:r="http://schemas.openxmlformats.org/officeDocument/2006/relationships" xmlns:p="http://schemas.openxmlformats.org/presentationml/2006/main">
+  <p:cSld>
+    <p:spTree>
+      <p:nvGrpSpPr>
+        <p:cNvPr id="1" name="">
+          <a:extLst>
+            <a:ext uri="{FF2B5EF4-FFF2-40B4-BE49-F238E27FC236}">
+              <a16:creationId xmlns:a16="http://schemas.microsoft.com/office/drawing/2014/main" id="{2E788A5F-0F17-C534-3C7E-E8972A54FE59}"/>
+            </a:ext>
+          </a:extLst>
+        </p:cNvPr>
+        <p:cNvGrpSpPr/>
+        <p:nvPr/>
+      </p:nvGrpSpPr>
+      <p:grpSpPr>
+        <a:xfrm>
+          <a:off x="0" y="0"/>
+          <a:ext cx="0" cy="0"/>
+          <a:chOff x="0" y="0"/>
+          <a:chExt cx="0" cy="0"/>
+        </a:xfrm>
+      </p:grpSpPr>
+      <p:sp>
+        <p:nvSpPr>
+          <p:cNvPr id="4" name="TextBox 3">
+            <a:extLst>
+              <a:ext uri="{FF2B5EF4-FFF2-40B4-BE49-F238E27FC236}">
+                <a16:creationId xmlns:a16="http://schemas.microsoft.com/office/drawing/2014/main" id="{0307C231-40ED-F628-864D-AE353032E541}"/>
+              </a:ext>
+            </a:extLst>
+          </p:cNvPr>
+          <p:cNvSpPr txBox="1"/>
+          <p:nvPr/>
+        </p:nvSpPr>
+        <p:spPr>
+          <a:xfrm>
+            <a:off x="796412" y="1118022"/>
+            <a:ext cx="10540181" cy="769441"/>
+          </a:xfrm>
+          <a:prstGeom prst="rect">
+            <a:avLst/>
+          </a:prstGeom>
+          <a:noFill/>
+        </p:spPr>
+        <p:txBody>
+          <a:bodyPr wrap="square" rtlCol="0">
+            <a:spAutoFit/>
+          </a:bodyPr>
+          <a:lstStyle/>
+          <a:p>
+            <a:r>
+              <a:rPr lang="en-US" sz="4400" dirty="0">
+                <a:solidFill>
+                  <a:schemeClr val="tx1">
+                    <a:lumMod val="75000"/>
+                    <a:lumOff val="25000"/>
+                  </a:schemeClr>
+                </a:solidFill>
+                <a:latin typeface="Anuphan" pitchFamily="2" charset="-34"/>
+                <a:cs typeface="Anuphan" pitchFamily="2" charset="-34"/>
+              </a:rPr>
+              <a:t>GROUP BY + single aggregate</a:t>
+            </a:r>
+          </a:p>
+        </p:txBody>
+      </p:sp>
+      <p:pic>
+        <p:nvPicPr>
+          <p:cNvPr id="3" name="Picture 2">
+            <a:extLst>
+              <a:ext uri="{FF2B5EF4-FFF2-40B4-BE49-F238E27FC236}">
+                <a16:creationId xmlns:a16="http://schemas.microsoft.com/office/drawing/2014/main" id="{B11EC83A-631A-B468-8F33-7BB43F29D8C3}"/>
+              </a:ext>
+            </a:extLst>
+          </p:cNvPr>
+          <p:cNvPicPr>
+            <a:picLocks noChangeAspect="1"/>
+          </p:cNvPicPr>
+          <p:nvPr/>
+        </p:nvPicPr>
+        <p:blipFill>
+          <a:blip r:embed="rId2"/>
+          <a:stretch>
+            <a:fillRect/>
+          </a:stretch>
+        </p:blipFill>
+        <p:spPr>
+          <a:xfrm>
+            <a:off x="1229248" y="2038499"/>
+            <a:ext cx="9733504" cy="2781002"/>
+          </a:xfrm>
+          <a:prstGeom prst="rect">
+            <a:avLst/>
+          </a:prstGeom>
+          <a:ln w="38100" cap="sq">
+            <a:solidFill>
+              <a:srgbClr val="000000"/>
+            </a:solidFill>
+            <a:prstDash val="solid"/>
+            <a:miter lim="800000"/>
+          </a:ln>
+          <a:effectLst>
+            <a:outerShdw blurRad="50800" dist="38100" dir="2700000" algn="tl" rotWithShape="0">
+              <a:srgbClr val="000000">
+                <a:alpha val="43000"/>
+              </a:srgbClr>
+            </a:outerShdw>
+          </a:effectLst>
+        </p:spPr>
+      </p:pic>
+    </p:spTree>
+    <p:extLst>
+      <p:ext uri="{BB962C8B-B14F-4D97-AF65-F5344CB8AC3E}">
+        <p14:creationId xmlns:p14="http://schemas.microsoft.com/office/powerpoint/2010/main" val="1299265789"/>
+      </p:ext>
+    </p:extLst>
+  </p:cSld>
+  <p:clrMapOvr>
+    <a:masterClrMapping/>
+  </p:clrMapOvr>
+</p:sld>
+</file>
+
+<file path=ppt/slides/slide19.xml><?xml version="1.0" encoding="utf-8"?>
+<p:sld xmlns:a="http://schemas.openxmlformats.org/drawingml/2006/main" xmlns:r="http://schemas.openxmlformats.org/officeDocument/2006/relationships" xmlns:p="http://schemas.openxmlformats.org/presentationml/2006/main">
+  <p:cSld>
+    <p:spTree>
+      <p:nvGrpSpPr>
+        <p:cNvPr id="1" name="">
+          <a:extLst>
+            <a:ext uri="{FF2B5EF4-FFF2-40B4-BE49-F238E27FC236}">
+              <a16:creationId xmlns:a16="http://schemas.microsoft.com/office/drawing/2014/main" id="{26289A50-1CE7-04C3-3B61-00C07B553383}"/>
+            </a:ext>
+          </a:extLst>
+        </p:cNvPr>
+        <p:cNvGrpSpPr/>
+        <p:nvPr/>
+      </p:nvGrpSpPr>
+      <p:grpSpPr>
+        <a:xfrm>
+          <a:off x="0" y="0"/>
+          <a:ext cx="0" cy="0"/>
+          <a:chOff x="0" y="0"/>
+          <a:chExt cx="0" cy="0"/>
+        </a:xfrm>
+      </p:grpSpPr>
+      <p:sp>
+        <p:nvSpPr>
+          <p:cNvPr id="4" name="TextBox 3">
+            <a:extLst>
+              <a:ext uri="{FF2B5EF4-FFF2-40B4-BE49-F238E27FC236}">
+                <a16:creationId xmlns:a16="http://schemas.microsoft.com/office/drawing/2014/main" id="{005B10E8-AF78-08AF-278E-66D273FB7088}"/>
+              </a:ext>
+            </a:extLst>
+          </p:cNvPr>
+          <p:cNvSpPr txBox="1"/>
+          <p:nvPr/>
+        </p:nvSpPr>
+        <p:spPr>
+          <a:xfrm>
+            <a:off x="796412" y="1118022"/>
+            <a:ext cx="10540181" cy="769441"/>
+          </a:xfrm>
+          <a:prstGeom prst="rect">
+            <a:avLst/>
+          </a:prstGeom>
+          <a:noFill/>
+        </p:spPr>
+        <p:txBody>
+          <a:bodyPr wrap="square" rtlCol="0">
+            <a:spAutoFit/>
+          </a:bodyPr>
+          <a:lstStyle/>
+          <a:p>
+            <a:r>
+              <a:rPr lang="en-US" sz="4400" dirty="0">
+                <a:solidFill>
+                  <a:schemeClr val="tx1">
+                    <a:lumMod val="75000"/>
+                    <a:lumOff val="25000"/>
+                  </a:schemeClr>
+                </a:solidFill>
+                <a:latin typeface="Anuphan" pitchFamily="2" charset="-34"/>
+                <a:cs typeface="Anuphan" pitchFamily="2" charset="-34"/>
+              </a:rPr>
+              <a:t>GROUP BY + multiple aggregates</a:t>
+            </a:r>
+          </a:p>
+        </p:txBody>
+      </p:sp>
+      <p:pic>
+        <p:nvPicPr>
+          <p:cNvPr id="5" name="Picture 4">
+            <a:extLst>
+              <a:ext uri="{FF2B5EF4-FFF2-40B4-BE49-F238E27FC236}">
+                <a16:creationId xmlns:a16="http://schemas.microsoft.com/office/drawing/2014/main" id="{99426B23-EB2E-836F-C29B-FC95B40C7A70}"/>
+              </a:ext>
+            </a:extLst>
+          </p:cNvPr>
+          <p:cNvPicPr>
+            <a:picLocks noChangeAspect="1"/>
+          </p:cNvPicPr>
+          <p:nvPr/>
+        </p:nvPicPr>
+        <p:blipFill>
+          <a:blip r:embed="rId2"/>
+          <a:stretch>
+            <a:fillRect/>
+          </a:stretch>
+        </p:blipFill>
+        <p:spPr>
+          <a:xfrm>
+            <a:off x="2274276" y="1963566"/>
+            <a:ext cx="7643448" cy="4582380"/>
+          </a:xfrm>
+          <a:prstGeom prst="rect">
+            <a:avLst/>
+          </a:prstGeom>
+          <a:ln w="38100" cap="sq">
+            <a:solidFill>
+              <a:srgbClr val="000000"/>
+            </a:solidFill>
+            <a:prstDash val="solid"/>
+            <a:miter lim="800000"/>
+          </a:ln>
+          <a:effectLst>
+            <a:outerShdw blurRad="50800" dist="38100" dir="2700000" algn="tl" rotWithShape="0">
+              <a:srgbClr val="000000">
+                <a:alpha val="43000"/>
+              </a:srgbClr>
+            </a:outerShdw>
+          </a:effectLst>
+        </p:spPr>
+      </p:pic>
+    </p:spTree>
+    <p:extLst>
+      <p:ext uri="{BB962C8B-B14F-4D97-AF65-F5344CB8AC3E}">
+        <p14:creationId xmlns:p14="http://schemas.microsoft.com/office/powerpoint/2010/main" val="322378932"/>
+      </p:ext>
+    </p:extLst>
+  </p:cSld>
+  <p:clrMapOvr>
+    <a:masterClrMapping/>
+  </p:clrMapOvr>
+</p:sld>
+</file>
+
 <file path=ppt/slides/slide2.xml><?xml version="1.0" encoding="utf-8"?>
 <p:sld xmlns:a="http://schemas.openxmlformats.org/drawingml/2006/main" xmlns:r="http://schemas.openxmlformats.org/officeDocument/2006/relationships" xmlns:p="http://schemas.openxmlformats.org/presentationml/2006/main">
   <p:cSld>
@@ -4365,6 +5245,531 @@
     <p:extLst>
       <p:ext uri="{BB962C8B-B14F-4D97-AF65-F5344CB8AC3E}">
         <p14:creationId xmlns:p14="http://schemas.microsoft.com/office/powerpoint/2010/main" val="2440594191"/>
+      </p:ext>
+    </p:extLst>
+  </p:cSld>
+  <p:clrMapOvr>
+    <a:masterClrMapping/>
+  </p:clrMapOvr>
+</p:sld>
+</file>
+
+<file path=ppt/slides/slide20.xml><?xml version="1.0" encoding="utf-8"?>
+<p:sld xmlns:a="http://schemas.openxmlformats.org/drawingml/2006/main" xmlns:r="http://schemas.openxmlformats.org/officeDocument/2006/relationships" xmlns:p="http://schemas.openxmlformats.org/presentationml/2006/main">
+  <p:cSld>
+    <p:spTree>
+      <p:nvGrpSpPr>
+        <p:cNvPr id="1" name="">
+          <a:extLst>
+            <a:ext uri="{FF2B5EF4-FFF2-40B4-BE49-F238E27FC236}">
+              <a16:creationId xmlns:a16="http://schemas.microsoft.com/office/drawing/2014/main" id="{1F503CBA-3AA4-83AD-C8B4-A286A4BBB334}"/>
+            </a:ext>
+          </a:extLst>
+        </p:cNvPr>
+        <p:cNvGrpSpPr/>
+        <p:nvPr/>
+      </p:nvGrpSpPr>
+      <p:grpSpPr>
+        <a:xfrm>
+          <a:off x="0" y="0"/>
+          <a:ext cx="0" cy="0"/>
+          <a:chOff x="0" y="0"/>
+          <a:chExt cx="0" cy="0"/>
+        </a:xfrm>
+      </p:grpSpPr>
+      <p:sp>
+        <p:nvSpPr>
+          <p:cNvPr id="4" name="TextBox 3">
+            <a:extLst>
+              <a:ext uri="{FF2B5EF4-FFF2-40B4-BE49-F238E27FC236}">
+                <a16:creationId xmlns:a16="http://schemas.microsoft.com/office/drawing/2014/main" id="{6F3EAF60-9C9B-7568-738C-1230B52F0A16}"/>
+              </a:ext>
+            </a:extLst>
+          </p:cNvPr>
+          <p:cNvSpPr txBox="1"/>
+          <p:nvPr/>
+        </p:nvSpPr>
+        <p:spPr>
+          <a:xfrm>
+            <a:off x="796412" y="1118022"/>
+            <a:ext cx="10540181" cy="769441"/>
+          </a:xfrm>
+          <a:prstGeom prst="rect">
+            <a:avLst/>
+          </a:prstGeom>
+          <a:noFill/>
+        </p:spPr>
+        <p:txBody>
+          <a:bodyPr wrap="square" rtlCol="0">
+            <a:spAutoFit/>
+          </a:bodyPr>
+          <a:lstStyle/>
+          <a:p>
+            <a:r>
+              <a:rPr lang="en-US" sz="4400" dirty="0">
+                <a:solidFill>
+                  <a:schemeClr val="tx1">
+                    <a:lumMod val="75000"/>
+                    <a:lumOff val="25000"/>
+                  </a:schemeClr>
+                </a:solidFill>
+                <a:latin typeface="Anuphan" pitchFamily="2" charset="-34"/>
+                <a:cs typeface="Anuphan" pitchFamily="2" charset="-34"/>
+              </a:rPr>
+              <a:t>GROUP BY multiple columns</a:t>
+            </a:r>
+          </a:p>
+        </p:txBody>
+      </p:sp>
+      <p:pic>
+        <p:nvPicPr>
+          <p:cNvPr id="3" name="Picture 2">
+            <a:extLst>
+              <a:ext uri="{FF2B5EF4-FFF2-40B4-BE49-F238E27FC236}">
+                <a16:creationId xmlns:a16="http://schemas.microsoft.com/office/drawing/2014/main" id="{6D76A8B4-4407-59AB-4DB8-06C6128B4B97}"/>
+              </a:ext>
+            </a:extLst>
+          </p:cNvPr>
+          <p:cNvPicPr>
+            <a:picLocks noChangeAspect="1"/>
+          </p:cNvPicPr>
+          <p:nvPr/>
+        </p:nvPicPr>
+        <p:blipFill>
+          <a:blip r:embed="rId2"/>
+          <a:stretch>
+            <a:fillRect/>
+          </a:stretch>
+        </p:blipFill>
+        <p:spPr>
+          <a:xfrm>
+            <a:off x="1373184" y="2133600"/>
+            <a:ext cx="9445632" cy="1784554"/>
+          </a:xfrm>
+          <a:prstGeom prst="rect">
+            <a:avLst/>
+          </a:prstGeom>
+          <a:ln w="38100" cap="sq">
+            <a:solidFill>
+              <a:srgbClr val="000000"/>
+            </a:solidFill>
+            <a:prstDash val="solid"/>
+            <a:miter lim="800000"/>
+          </a:ln>
+          <a:effectLst>
+            <a:outerShdw blurRad="50800" dist="38100" dir="2700000" algn="tl" rotWithShape="0">
+              <a:srgbClr val="000000">
+                <a:alpha val="43000"/>
+              </a:srgbClr>
+            </a:outerShdw>
+          </a:effectLst>
+        </p:spPr>
+      </p:pic>
+    </p:spTree>
+    <p:extLst>
+      <p:ext uri="{BB962C8B-B14F-4D97-AF65-F5344CB8AC3E}">
+        <p14:creationId xmlns:p14="http://schemas.microsoft.com/office/powerpoint/2010/main" val="289039734"/>
+      </p:ext>
+    </p:extLst>
+  </p:cSld>
+  <p:clrMapOvr>
+    <a:masterClrMapping/>
+  </p:clrMapOvr>
+</p:sld>
+</file>
+
+<file path=ppt/slides/slide21.xml><?xml version="1.0" encoding="utf-8"?>
+<p:sld xmlns:a="http://schemas.openxmlformats.org/drawingml/2006/main" xmlns:r="http://schemas.openxmlformats.org/officeDocument/2006/relationships" xmlns:p="http://schemas.openxmlformats.org/presentationml/2006/main">
+  <p:cSld>
+    <p:spTree>
+      <p:nvGrpSpPr>
+        <p:cNvPr id="1" name="">
+          <a:extLst>
+            <a:ext uri="{FF2B5EF4-FFF2-40B4-BE49-F238E27FC236}">
+              <a16:creationId xmlns:a16="http://schemas.microsoft.com/office/drawing/2014/main" id="{B961304E-AAE5-D823-E253-C082115E6CAE}"/>
+            </a:ext>
+          </a:extLst>
+        </p:cNvPr>
+        <p:cNvGrpSpPr/>
+        <p:nvPr/>
+      </p:nvGrpSpPr>
+      <p:grpSpPr>
+        <a:xfrm>
+          <a:off x="0" y="0"/>
+          <a:ext cx="0" cy="0"/>
+          <a:chOff x="0" y="0"/>
+          <a:chExt cx="0" cy="0"/>
+        </a:xfrm>
+      </p:grpSpPr>
+      <p:sp>
+        <p:nvSpPr>
+          <p:cNvPr id="4" name="TextBox 3">
+            <a:extLst>
+              <a:ext uri="{FF2B5EF4-FFF2-40B4-BE49-F238E27FC236}">
+                <a16:creationId xmlns:a16="http://schemas.microsoft.com/office/drawing/2014/main" id="{5F481265-E030-FC16-E6A5-340C1B5CA8C7}"/>
+              </a:ext>
+            </a:extLst>
+          </p:cNvPr>
+          <p:cNvSpPr txBox="1"/>
+          <p:nvPr/>
+        </p:nvSpPr>
+        <p:spPr>
+          <a:xfrm>
+            <a:off x="796412" y="1118022"/>
+            <a:ext cx="10540181" cy="769441"/>
+          </a:xfrm>
+          <a:prstGeom prst="rect">
+            <a:avLst/>
+          </a:prstGeom>
+          <a:noFill/>
+        </p:spPr>
+        <p:txBody>
+          <a:bodyPr wrap="square" rtlCol="0">
+            <a:spAutoFit/>
+          </a:bodyPr>
+          <a:lstStyle/>
+          <a:p>
+            <a:r>
+              <a:rPr lang="en-US" sz="4400" dirty="0">
+                <a:solidFill>
+                  <a:schemeClr val="tx1">
+                    <a:lumMod val="75000"/>
+                    <a:lumOff val="25000"/>
+                  </a:schemeClr>
+                </a:solidFill>
+                <a:latin typeface="Anuphan" pitchFamily="2" charset="-34"/>
+                <a:cs typeface="Anuphan" pitchFamily="2" charset="-34"/>
+              </a:rPr>
+              <a:t> HAVING (filter after group by)</a:t>
+            </a:r>
+          </a:p>
+        </p:txBody>
+      </p:sp>
+      <p:pic>
+        <p:nvPicPr>
+          <p:cNvPr id="5" name="Picture 4">
+            <a:extLst>
+              <a:ext uri="{FF2B5EF4-FFF2-40B4-BE49-F238E27FC236}">
+                <a16:creationId xmlns:a16="http://schemas.microsoft.com/office/drawing/2014/main" id="{8FD3BFF2-D5B5-436C-D19F-47A9D4997F9A}"/>
+              </a:ext>
+            </a:extLst>
+          </p:cNvPr>
+          <p:cNvPicPr>
+            <a:picLocks noChangeAspect="1"/>
+          </p:cNvPicPr>
+          <p:nvPr/>
+        </p:nvPicPr>
+        <p:blipFill>
+          <a:blip r:embed="rId2"/>
+          <a:stretch>
+            <a:fillRect/>
+          </a:stretch>
+        </p:blipFill>
+        <p:spPr>
+          <a:xfrm>
+            <a:off x="908182" y="2222090"/>
+            <a:ext cx="10375636" cy="2413820"/>
+          </a:xfrm>
+          <a:prstGeom prst="rect">
+            <a:avLst/>
+          </a:prstGeom>
+          <a:ln w="38100" cap="sq">
+            <a:solidFill>
+              <a:srgbClr val="000000"/>
+            </a:solidFill>
+            <a:prstDash val="solid"/>
+            <a:miter lim="800000"/>
+          </a:ln>
+          <a:effectLst>
+            <a:outerShdw blurRad="50800" dist="38100" dir="2700000" algn="tl" rotWithShape="0">
+              <a:srgbClr val="000000">
+                <a:alpha val="43000"/>
+              </a:srgbClr>
+            </a:outerShdw>
+          </a:effectLst>
+        </p:spPr>
+      </p:pic>
+    </p:spTree>
+    <p:extLst>
+      <p:ext uri="{BB962C8B-B14F-4D97-AF65-F5344CB8AC3E}">
+        <p14:creationId xmlns:p14="http://schemas.microsoft.com/office/powerpoint/2010/main" val="3665693668"/>
+      </p:ext>
+    </p:extLst>
+  </p:cSld>
+  <p:clrMapOvr>
+    <a:masterClrMapping/>
+  </p:clrMapOvr>
+</p:sld>
+</file>
+
+<file path=ppt/slides/slide22.xml><?xml version="1.0" encoding="utf-8"?>
+<p:sld xmlns:a="http://schemas.openxmlformats.org/drawingml/2006/main" xmlns:r="http://schemas.openxmlformats.org/officeDocument/2006/relationships" xmlns:p="http://schemas.openxmlformats.org/presentationml/2006/main">
+  <p:cSld>
+    <p:spTree>
+      <p:nvGrpSpPr>
+        <p:cNvPr id="1" name="">
+          <a:extLst>
+            <a:ext uri="{FF2B5EF4-FFF2-40B4-BE49-F238E27FC236}">
+              <a16:creationId xmlns:a16="http://schemas.microsoft.com/office/drawing/2014/main" id="{6CF418A5-43AC-8C0E-F739-DB421DF391C0}"/>
+            </a:ext>
+          </a:extLst>
+        </p:cNvPr>
+        <p:cNvGrpSpPr/>
+        <p:nvPr/>
+      </p:nvGrpSpPr>
+      <p:grpSpPr>
+        <a:xfrm>
+          <a:off x="0" y="0"/>
+          <a:ext cx="0" cy="0"/>
+          <a:chOff x="0" y="0"/>
+          <a:chExt cx="0" cy="0"/>
+        </a:xfrm>
+      </p:grpSpPr>
+      <p:sp>
+        <p:nvSpPr>
+          <p:cNvPr id="4" name="TextBox 3">
+            <a:extLst>
+              <a:ext uri="{FF2B5EF4-FFF2-40B4-BE49-F238E27FC236}">
+                <a16:creationId xmlns:a16="http://schemas.microsoft.com/office/drawing/2014/main" id="{CFB8C777-F2C8-0C32-CE37-B6BD87426404}"/>
+              </a:ext>
+            </a:extLst>
+          </p:cNvPr>
+          <p:cNvSpPr txBox="1"/>
+          <p:nvPr/>
+        </p:nvSpPr>
+        <p:spPr>
+          <a:xfrm>
+            <a:off x="796412" y="1118022"/>
+            <a:ext cx="10540181" cy="1446550"/>
+          </a:xfrm>
+          <a:prstGeom prst="rect">
+            <a:avLst/>
+          </a:prstGeom>
+          <a:noFill/>
+        </p:spPr>
+        <p:txBody>
+          <a:bodyPr wrap="square" rtlCol="0">
+            <a:spAutoFit/>
+          </a:bodyPr>
+          <a:lstStyle/>
+          <a:p>
+            <a:r>
+              <a:rPr lang="en-US" sz="4400" dirty="0" err="1">
+                <a:solidFill>
+                  <a:schemeClr val="tx1">
+                    <a:lumMod val="75000"/>
+                    <a:lumOff val="25000"/>
+                  </a:schemeClr>
+                </a:solidFill>
+                <a:latin typeface="Anuphan" pitchFamily="2" charset="-34"/>
+                <a:cs typeface="Anuphan" pitchFamily="2" charset="-34"/>
+              </a:rPr>
+              <a:t>value_counts</a:t>
+            </a:r>
+            <a:r>
+              <a:rPr lang="en-US" sz="4400" dirty="0">
+                <a:solidFill>
+                  <a:schemeClr val="tx1">
+                    <a:lumMod val="75000"/>
+                    <a:lumOff val="25000"/>
+                  </a:schemeClr>
+                </a:solidFill>
+                <a:latin typeface="Anuphan" pitchFamily="2" charset="-34"/>
+                <a:cs typeface="Anuphan" pitchFamily="2" charset="-34"/>
+              </a:rPr>
+              <a:t> </a:t>
+            </a:r>
+          </a:p>
+          <a:p>
+            <a:r>
+              <a:rPr lang="en-US" sz="4400" dirty="0">
+                <a:solidFill>
+                  <a:schemeClr val="tx1">
+                    <a:lumMod val="75000"/>
+                    <a:lumOff val="25000"/>
+                  </a:schemeClr>
+                </a:solidFill>
+                <a:latin typeface="Anuphan" pitchFamily="2" charset="-34"/>
+                <a:cs typeface="Anuphan" pitchFamily="2" charset="-34"/>
+              </a:rPr>
+              <a:t>(like COUNT + GROUP BY in one shot)</a:t>
+            </a:r>
+          </a:p>
+        </p:txBody>
+      </p:sp>
+      <p:pic>
+        <p:nvPicPr>
+          <p:cNvPr id="3" name="Picture 2">
+            <a:extLst>
+              <a:ext uri="{FF2B5EF4-FFF2-40B4-BE49-F238E27FC236}">
+                <a16:creationId xmlns:a16="http://schemas.microsoft.com/office/drawing/2014/main" id="{1FDEEAA6-FD6C-D8D2-A125-55E7EC394C5C}"/>
+              </a:ext>
+            </a:extLst>
+          </p:cNvPr>
+          <p:cNvPicPr>
+            <a:picLocks noChangeAspect="1"/>
+          </p:cNvPicPr>
+          <p:nvPr/>
+        </p:nvPicPr>
+        <p:blipFill>
+          <a:blip r:embed="rId2"/>
+          <a:stretch>
+            <a:fillRect/>
+          </a:stretch>
+        </p:blipFill>
+        <p:spPr>
+          <a:xfrm>
+            <a:off x="1565207" y="2859541"/>
+            <a:ext cx="9061586" cy="3046376"/>
+          </a:xfrm>
+          <a:prstGeom prst="rect">
+            <a:avLst/>
+          </a:prstGeom>
+          <a:ln w="38100" cap="sq">
+            <a:solidFill>
+              <a:srgbClr val="000000"/>
+            </a:solidFill>
+            <a:prstDash val="solid"/>
+            <a:miter lim="800000"/>
+          </a:ln>
+          <a:effectLst>
+            <a:outerShdw blurRad="50800" dist="38100" dir="2700000" algn="tl" rotWithShape="0">
+              <a:srgbClr val="000000">
+                <a:alpha val="43000"/>
+              </a:srgbClr>
+            </a:outerShdw>
+          </a:effectLst>
+        </p:spPr>
+      </p:pic>
+    </p:spTree>
+    <p:extLst>
+      <p:ext uri="{BB962C8B-B14F-4D97-AF65-F5344CB8AC3E}">
+        <p14:creationId xmlns:p14="http://schemas.microsoft.com/office/powerpoint/2010/main" val="1880161842"/>
+      </p:ext>
+    </p:extLst>
+  </p:cSld>
+  <p:clrMapOvr>
+    <a:masterClrMapping/>
+  </p:clrMapOvr>
+</p:sld>
+</file>
+
+<file path=ppt/slides/slide23.xml><?xml version="1.0" encoding="utf-8"?>
+<p:sld xmlns:a="http://schemas.openxmlformats.org/drawingml/2006/main" xmlns:r="http://schemas.openxmlformats.org/officeDocument/2006/relationships" xmlns:p="http://schemas.openxmlformats.org/presentationml/2006/main">
+  <p:cSld>
+    <p:spTree>
+      <p:nvGrpSpPr>
+        <p:cNvPr id="1" name="">
+          <a:extLst>
+            <a:ext uri="{FF2B5EF4-FFF2-40B4-BE49-F238E27FC236}">
+              <a16:creationId xmlns:a16="http://schemas.microsoft.com/office/drawing/2014/main" id="{E68C2DAA-35D5-518F-08BC-DE4BABBD580F}"/>
+            </a:ext>
+          </a:extLst>
+        </p:cNvPr>
+        <p:cNvGrpSpPr/>
+        <p:nvPr/>
+      </p:nvGrpSpPr>
+      <p:grpSpPr>
+        <a:xfrm>
+          <a:off x="0" y="0"/>
+          <a:ext cx="0" cy="0"/>
+          <a:chOff x="0" y="0"/>
+          <a:chExt cx="0" cy="0"/>
+        </a:xfrm>
+      </p:grpSpPr>
+      <p:sp>
+        <p:nvSpPr>
+          <p:cNvPr id="4" name="TextBox 3">
+            <a:extLst>
+              <a:ext uri="{FF2B5EF4-FFF2-40B4-BE49-F238E27FC236}">
+                <a16:creationId xmlns:a16="http://schemas.microsoft.com/office/drawing/2014/main" id="{E41CFCFA-3DF5-DD19-0281-F616E6405DF4}"/>
+              </a:ext>
+            </a:extLst>
+          </p:cNvPr>
+          <p:cNvSpPr txBox="1"/>
+          <p:nvPr/>
+        </p:nvSpPr>
+        <p:spPr>
+          <a:xfrm>
+            <a:off x="796412" y="1118022"/>
+            <a:ext cx="10540181" cy="769441"/>
+          </a:xfrm>
+          <a:prstGeom prst="rect">
+            <a:avLst/>
+          </a:prstGeom>
+          <a:noFill/>
+        </p:spPr>
+        <p:txBody>
+          <a:bodyPr wrap="square" rtlCol="0">
+            <a:spAutoFit/>
+          </a:bodyPr>
+          <a:lstStyle/>
+          <a:p>
+            <a:r>
+              <a:rPr lang="en-US" sz="4400" dirty="0"/>
+              <a:t>describe() — all stats at once</a:t>
+            </a:r>
+            <a:endParaRPr lang="en-US" sz="4400" dirty="0">
+              <a:solidFill>
+                <a:schemeClr val="tx1">
+                  <a:lumMod val="75000"/>
+                  <a:lumOff val="25000"/>
+                </a:schemeClr>
+              </a:solidFill>
+              <a:latin typeface="Anuphan" pitchFamily="2" charset="-34"/>
+              <a:cs typeface="Anuphan" pitchFamily="2" charset="-34"/>
+            </a:endParaRPr>
+          </a:p>
+        </p:txBody>
+      </p:sp>
+      <p:pic>
+        <p:nvPicPr>
+          <p:cNvPr id="5" name="Picture 4">
+            <a:extLst>
+              <a:ext uri="{FF2B5EF4-FFF2-40B4-BE49-F238E27FC236}">
+                <a16:creationId xmlns:a16="http://schemas.microsoft.com/office/drawing/2014/main" id="{A0477C24-E348-FAA1-CD98-ED1F8405A40E}"/>
+              </a:ext>
+            </a:extLst>
+          </p:cNvPr>
+          <p:cNvPicPr>
+            <a:picLocks noChangeAspect="1"/>
+          </p:cNvPicPr>
+          <p:nvPr/>
+        </p:nvPicPr>
+        <p:blipFill>
+          <a:blip r:embed="rId2"/>
+          <a:stretch>
+            <a:fillRect/>
+          </a:stretch>
+        </p:blipFill>
+        <p:spPr>
+          <a:xfrm>
+            <a:off x="1088661" y="2163097"/>
+            <a:ext cx="10014678" cy="1941870"/>
+          </a:xfrm>
+          <a:prstGeom prst="rect">
+            <a:avLst/>
+          </a:prstGeom>
+          <a:ln w="38100" cap="sq">
+            <a:solidFill>
+              <a:srgbClr val="000000"/>
+            </a:solidFill>
+            <a:prstDash val="solid"/>
+            <a:miter lim="800000"/>
+          </a:ln>
+          <a:effectLst>
+            <a:outerShdw blurRad="50800" dist="38100" dir="2700000" algn="tl" rotWithShape="0">
+              <a:srgbClr val="000000">
+                <a:alpha val="43000"/>
+              </a:srgbClr>
+            </a:outerShdw>
+          </a:effectLst>
+        </p:spPr>
+      </p:pic>
+    </p:spTree>
+    <p:extLst>
+      <p:ext uri="{BB962C8B-B14F-4D97-AF65-F5344CB8AC3E}">
+        <p14:creationId xmlns:p14="http://schemas.microsoft.com/office/powerpoint/2010/main" val="3142010453"/>
       </p:ext>
     </p:extLst>
   </p:cSld>
